--- a/media/resources/files/ButunSandardyJanaOnduktardyKoboytuuBoluu-10-100-1000-TARSOYUNU.pptx
+++ b/media/resources/files/ButunSandardyJanaOnduktardyKoboytuuBoluu-10-100-1000-TARSOYUNU.pptx
@@ -17302,7 +17302,7 @@
                 <a:ea typeface="+mn-ea"/>
                 <a:cs typeface="+mn-cs"/>
               </a:rPr>
-              <a:t>Турдуу пикирлер учун ыраазычылык билдиребиз.</a:t>
+              <a:t>Түрдүү пикирлер үчүн ыраазычылык билдиребиз.</a:t>
             </a:r>
           </a:p>
           <a:p>

--- a/media/resources/files/ButunSandardyJanaOnduktardyKoboytuuBoluu-10-100-1000-TARSOYUNU.pptx
+++ b/media/resources/files/ButunSandardyJanaOnduktardyKoboytuuBoluu-10-100-1000-TARSOYUNU.pptx
@@ -4144,7 +4144,7 @@
                 <a:ea typeface="+mn-ea"/>
                 <a:cs typeface="+mn-cs"/>
               </a:rPr>
-              <a:t>Окуучуларга багыттар берилиши мүмкүн (мугалим же башка студенттер тарабынан) жана жоопту биринчи көрсөткөн окуучу өз командасына упай алат.</a:t>
+              <a:t>Мугалим же башка окуучулар тапшырма бериши мүмкүн. Жоопту биринчи көрсөткөн окуучу өз командасына упай алат.</a:t>
             </a:r>
           </a:p>
           <a:p>
@@ -6723,7 +6723,7 @@
           <a:p>
             <a:r>
               <a:rPr lang="en-GB" sz="4400" dirty="0"/>
-              <a:t>0.5</a:t>
+              <a:t>0,5</a:t>
             </a:r>
             <a:endParaRPr lang="en-GB" sz="3200" dirty="0"/>
           </a:p>
@@ -6795,7 +6795,7 @@
           <a:p>
             <a:r>
               <a:rPr lang="en-GB" sz="3600" dirty="0"/>
-              <a:t>50,000</a:t>
+              <a:t>50 000</a:t>
             </a:r>
             <a:endParaRPr lang="en-GB" sz="2400" dirty="0"/>
           </a:p>
@@ -6867,7 +6867,7 @@
           <a:p>
             <a:r>
               <a:rPr lang="en-GB" sz="4400" dirty="0"/>
-              <a:t>5,000</a:t>
+              <a:t>5 000</a:t>
             </a:r>
             <a:endParaRPr lang="en-GB" sz="3200" dirty="0"/>
           </a:p>
@@ -6939,7 +6939,7 @@
           <a:p>
             <a:r>
               <a:rPr lang="en-GB" sz="3600" dirty="0"/>
-              <a:t>0.05</a:t>
+              <a:t>0,05</a:t>
             </a:r>
             <a:endParaRPr lang="en-GB" sz="2400" dirty="0"/>
           </a:p>
@@ -6975,7 +6975,7 @@
           <a:p>
             <a:r>
               <a:rPr lang="en-GB" sz="5400" dirty="0"/>
-              <a:t>0.005</a:t>
+              <a:t>0,005</a:t>
             </a:r>
             <a:endParaRPr lang="en-GB" sz="4000" dirty="0"/>
           </a:p>
@@ -7011,7 +7011,7 @@
           <a:p>
             <a:r>
               <a:rPr lang="en-GB" sz="5400" dirty="0"/>
-              <a:t>0.5</a:t>
+              <a:t>0,5</a:t>
             </a:r>
             <a:endParaRPr lang="en-GB" sz="4000" dirty="0"/>
           </a:p>
@@ -7083,7 +7083,7 @@
           <a:p>
             <a:r>
               <a:rPr lang="en-GB" sz="5400" dirty="0"/>
-              <a:t>50,000</a:t>
+              <a:t>50 000</a:t>
             </a:r>
             <a:endParaRPr lang="en-GB" sz="4000" dirty="0"/>
           </a:p>
@@ -7155,7 +7155,7 @@
           <a:p>
             <a:r>
               <a:rPr lang="en-GB" sz="5400" dirty="0"/>
-              <a:t>5,000</a:t>
+              <a:t>5 000</a:t>
             </a:r>
             <a:endParaRPr lang="en-GB" sz="4000" dirty="0"/>
           </a:p>
@@ -7227,7 +7227,7 @@
           <a:p>
             <a:r>
               <a:rPr lang="en-GB" sz="5400" dirty="0"/>
-              <a:t>0.05</a:t>
+              <a:t>0,05</a:t>
             </a:r>
             <a:endParaRPr lang="en-GB" sz="4000" dirty="0"/>
           </a:p>
@@ -7263,7 +7263,7 @@
           <a:p>
             <a:r>
               <a:rPr lang="en-GB" sz="4400" dirty="0"/>
-              <a:t>0.005</a:t>
+              <a:t>0,005</a:t>
             </a:r>
             <a:endParaRPr lang="en-GB" sz="3200" dirty="0"/>
           </a:p>
@@ -7443,7 +7443,7 @@
           <a:p>
             <a:r>
               <a:rPr lang="en-GB" sz="4000" dirty="0"/>
-              <a:t>8,000</a:t>
+              <a:t>8 000</a:t>
             </a:r>
             <a:endParaRPr lang="en-GB" sz="2800" dirty="0"/>
           </a:p>
@@ -7479,7 +7479,7 @@
           <a:p>
             <a:r>
               <a:rPr lang="en-GB" sz="4800" dirty="0"/>
-              <a:t>8,000</a:t>
+              <a:t>8 000</a:t>
             </a:r>
             <a:endParaRPr lang="en-GB" sz="3600" dirty="0"/>
           </a:p>
@@ -7515,7 +7515,7 @@
           <a:p>
             <a:r>
               <a:rPr lang="en-GB" sz="4800" dirty="0"/>
-              <a:t>0.06</a:t>
+              <a:t>0,06</a:t>
             </a:r>
             <a:endParaRPr lang="en-GB" sz="3600" dirty="0"/>
           </a:p>
@@ -7551,7 +7551,7 @@
           <a:p>
             <a:r>
               <a:rPr lang="en-GB" sz="4000" dirty="0"/>
-              <a:t>0.06</a:t>
+              <a:t>0,06</a:t>
             </a:r>
             <a:endParaRPr lang="en-GB" sz="2800" dirty="0"/>
           </a:p>
@@ -8133,7 +8133,7 @@
           <a:p>
             <a:r>
               <a:rPr lang="en-GB" sz="4000" dirty="0"/>
-              <a:t>5.05</a:t>
+              <a:t>5,05</a:t>
             </a:r>
             <a:endParaRPr lang="en-GB" sz="2800" dirty="0"/>
           </a:p>
@@ -8169,7 +8169,7 @@
           <a:p>
             <a:r>
               <a:rPr lang="en-GB" sz="4800" dirty="0"/>
-              <a:t>5.05</a:t>
+              <a:t>5,05</a:t>
             </a:r>
             <a:endParaRPr lang="en-GB" sz="3600" dirty="0"/>
           </a:p>
@@ -8205,7 +8205,7 @@
           <a:p>
             <a:r>
               <a:rPr lang="en-GB" sz="3600" dirty="0"/>
-              <a:t>50.5</a:t>
+              <a:t>50,5</a:t>
             </a:r>
             <a:endParaRPr lang="en-GB" sz="2400" dirty="0"/>
           </a:p>
@@ -8241,7 +8241,7 @@
           <a:p>
             <a:r>
               <a:rPr lang="en-GB" sz="4000" dirty="0"/>
-              <a:t>50.5</a:t>
+              <a:t>50,5</a:t>
             </a:r>
             <a:endParaRPr lang="en-GB" sz="2800" dirty="0"/>
           </a:p>
@@ -8493,7 +8493,7 @@
           <a:p>
             <a:r>
               <a:rPr lang="en-GB" sz="3600" dirty="0"/>
-              <a:t>0.505</a:t>
+              <a:t>0,505</a:t>
             </a:r>
             <a:endParaRPr lang="en-GB" sz="2400" dirty="0"/>
           </a:p>
@@ -8529,7 +8529,7 @@
           <a:p>
             <a:r>
               <a:rPr lang="en-GB" sz="4400" dirty="0"/>
-              <a:t>0.505</a:t>
+              <a:t>0,505</a:t>
             </a:r>
             <a:endParaRPr lang="en-GB" sz="3200" dirty="0"/>
           </a:p>
@@ -8565,7 +8565,7 @@
           <a:p>
             <a:r>
               <a:rPr lang="en-GB" sz="4400" dirty="0"/>
-              <a:t>0.0505</a:t>
+              <a:t>0,0505</a:t>
             </a:r>
             <a:endParaRPr lang="en-GB" sz="3200" dirty="0"/>
           </a:p>
@@ -8601,7 +8601,7 @@
           <a:p>
             <a:r>
               <a:rPr lang="en-GB" sz="4000" dirty="0"/>
-              <a:t>0.0505</a:t>
+              <a:t>0,0505</a:t>
             </a:r>
             <a:endParaRPr lang="en-GB" sz="2800" dirty="0"/>
           </a:p>
@@ -8709,7 +8709,7 @@
           <a:p>
             <a:r>
               <a:rPr lang="en-GB" sz="3600" dirty="0"/>
-              <a:t>0.55</a:t>
+              <a:t>0,55</a:t>
             </a:r>
             <a:endParaRPr lang="en-GB" sz="2400" dirty="0"/>
           </a:p>
@@ -8745,7 +8745,7 @@
           <a:p>
             <a:r>
               <a:rPr lang="en-GB" sz="4800" dirty="0"/>
-              <a:t>0.055</a:t>
+              <a:t>0,055</a:t>
             </a:r>
             <a:endParaRPr lang="en-GB" sz="3600" dirty="0"/>
           </a:p>
@@ -8853,7 +8853,7 @@
           <a:p>
             <a:r>
               <a:rPr lang="en-GB" sz="3600" dirty="0"/>
-              <a:t>0.55</a:t>
+              <a:t>0,55</a:t>
             </a:r>
             <a:endParaRPr lang="en-GB" sz="2400" dirty="0"/>
           </a:p>
@@ -8889,7 +8889,7 @@
           <a:p>
             <a:r>
               <a:rPr lang="en-GB" sz="4400" dirty="0"/>
-              <a:t>0.055</a:t>
+              <a:t>0,055</a:t>
             </a:r>
             <a:endParaRPr lang="en-GB" sz="3200" dirty="0"/>
           </a:p>
@@ -8925,7 +8925,7 @@
           <a:p>
             <a:r>
               <a:rPr lang="en-GB" sz="3600" dirty="0"/>
-              <a:t>0.5005</a:t>
+              <a:t>0,5005</a:t>
             </a:r>
             <a:endParaRPr lang="en-GB" sz="2400" dirty="0"/>
           </a:p>
@@ -8961,7 +8961,7 @@
           <a:p>
             <a:r>
               <a:rPr lang="en-GB" sz="3600" dirty="0"/>
-              <a:t>5.005</a:t>
+              <a:t>5,005</a:t>
             </a:r>
             <a:endParaRPr lang="en-GB" sz="2400" dirty="0"/>
           </a:p>
@@ -9033,7 +9033,7 @@
           <a:p>
             <a:r>
               <a:rPr lang="en-GB" sz="4800" dirty="0"/>
-              <a:t>0.5005</a:t>
+              <a:t>0,5005</a:t>
             </a:r>
             <a:endParaRPr lang="en-GB" sz="3600" dirty="0"/>
           </a:p>
@@ -9069,7 +9069,7 @@
           <a:p>
             <a:r>
               <a:rPr lang="en-GB" sz="4800" dirty="0"/>
-              <a:t>5.005</a:t>
+              <a:t>5,005</a:t>
             </a:r>
             <a:endParaRPr lang="en-GB" sz="3600" dirty="0"/>
           </a:p>
@@ -10221,7 +10221,7 @@
                               <a:ea typeface="+mn-ea"/>
                               <a:cs typeface="+mn-cs"/>
                             </a:rPr>
-                            <a:t>0.55 × 100</a:t>
+                            <a:t>0,55 × 100</a:t>
                           </a:r>
                         </a:p>
                       </a:txBody>
@@ -10477,7 +10477,7 @@
                               <a:ea typeface="+mn-ea"/>
                               <a:cs typeface="+mn-cs"/>
                             </a:rPr>
-                            <a:t>0.55 </a:t>
+                            <a:t>0,55 </a:t>
                           </a:r>
                           <a:r>
                             <a:rPr kumimoji="0" lang="en-GB" sz="2400" b="0" i="0" u="none" strike="noStrike" kern="1200" cap="none" spc="0" normalizeH="0" baseline="0" noProof="0" dirty="0">
@@ -10957,7 +10957,7 @@
                               <a:ea typeface="+mn-ea"/>
                               <a:cs typeface="+mn-cs"/>
                             </a:rPr>
-                            <a:t>0.6 × 100</a:t>
+                            <a:t>0,6 × 100</a:t>
                           </a:r>
                         </a:p>
                       </a:txBody>
@@ -11247,7 +11247,7 @@
                               <a:ea typeface="+mn-ea"/>
                               <a:cs typeface="+mn-cs"/>
                             </a:rPr>
-                            <a:t>80,000 ÷ </a:t>
+                            <a:t>80 000 ÷ </a:t>
                           </a:r>
                           <a:r>
                             <a:rPr kumimoji="0" lang="en-GB" sz="2400" b="0" i="0" u="none" strike="noStrike" kern="1200" cap="none" spc="0" normalizeH="0" baseline="0" noProof="0" dirty="0">
@@ -11347,7 +11347,7 @@
                               <a:ea typeface="+mn-ea"/>
                               <a:cs typeface="+mn-cs"/>
                             </a:rPr>
-                            <a:t>0.000505 × 100</a:t>
+                            <a:t>0,000505 × 100</a:t>
                           </a:r>
                         </a:p>
                       </a:txBody>
@@ -11910,7 +11910,7 @@
                               <a:ea typeface="+mn-ea"/>
                               <a:cs typeface="+mn-cs"/>
                             </a:rPr>
-                            <a:t>5.050 × 1000</a:t>
+                            <a:t>5,050 × 1000</a:t>
                           </a:r>
                         </a:p>
                       </a:txBody>
@@ -12083,7 +12083,7 @@
                               <a:ea typeface="+mn-ea"/>
                               <a:cs typeface="+mn-cs"/>
                             </a:rPr>
-                            <a:t>0.8 × 1000</a:t>
+                            <a:t>0,8 × 1000</a:t>
                           </a:r>
                         </a:p>
                       </a:txBody>
@@ -12166,7 +12166,7 @@
                               <a:ea typeface="+mn-ea"/>
                               <a:cs typeface="+mn-cs"/>
                             </a:rPr>
-                            <a:t>5005 ÷ 10,000</a:t>
+                            <a:t>5005 ÷ 10 000</a:t>
                           </a:r>
                         </a:p>
                       </a:txBody>
@@ -12339,7 +12339,7 @@
                               <a:ea typeface="+mn-ea"/>
                               <a:cs typeface="+mn-cs"/>
                             </a:rPr>
-                            <a:t>0.5 ÷ </a:t>
+                            <a:t>0,5 ÷ </a:t>
                           </a:r>
                           <a:r>
                             <a:rPr kumimoji="0" lang="en-GB" sz="2400" b="0" i="0" u="none" strike="noStrike" kern="1200" cap="none" spc="0" normalizeH="0" baseline="0" noProof="0" dirty="0">
@@ -12760,7 +12760,7 @@
                               <a:ea typeface="+mn-ea"/>
                               <a:cs typeface="+mn-cs"/>
                             </a:rPr>
-                            <a:t>5.05 ÷ 1000 × 10</a:t>
+                            <a:t>5,05 ÷ 1000 × 10</a:t>
                           </a:r>
                         </a:p>
                       </a:txBody>
@@ -12850,7 +12850,7 @@
                               <a:ea typeface="+mn-ea"/>
                               <a:cs typeface="+mn-cs"/>
                             </a:rPr>
-                            <a:t>7,000 ÷ </a:t>
+                            <a:t>7 000 ÷ </a:t>
                           </a:r>
                           <a:r>
                             <a:rPr kumimoji="0" lang="en-GB" sz="2400" b="0" i="0" u="none" strike="noStrike" kern="1200" cap="none" spc="0" normalizeH="0" baseline="0" noProof="0" dirty="0">
@@ -12950,7 +12950,7 @@
                               <a:ea typeface="+mn-ea"/>
                               <a:cs typeface="+mn-cs"/>
                             </a:rPr>
-                            <a:t>500,000 ÷ </a:t>
+                            <a:t>500 000 ÷ </a:t>
                           </a:r>
                           <a:r>
                             <a:rPr kumimoji="0" lang="en-GB" sz="2400" b="0" i="0" u="none" strike="noStrike" kern="1200" cap="none" spc="0" normalizeH="0" baseline="0" noProof="0" dirty="0">
@@ -13050,7 +13050,7 @@
                               <a:ea typeface="+mn-ea"/>
                               <a:cs typeface="+mn-cs"/>
                             </a:rPr>
-                            <a:t>0.000055 × 10,000</a:t>
+                            <a:t>0,000055 × 10 000</a:t>
                           </a:r>
                         </a:p>
                       </a:txBody>
@@ -14116,7 +14116,7 @@
                               <a:ea typeface="+mn-ea"/>
                               <a:cs typeface="+mn-cs"/>
                             </a:rPr>
-                            <a:t>0.55 × 100</a:t>
+                            <a:t>0,55 × 100</a:t>
                           </a:r>
                         </a:p>
                       </a:txBody>
@@ -14372,7 +14372,7 @@
                               <a:ea typeface="+mn-ea"/>
                               <a:cs typeface="+mn-cs"/>
                             </a:rPr>
-                            <a:t>0.55 </a:t>
+                            <a:t>0,55 </a:t>
                           </a:r>
                           <a:r>
                             <a:rPr kumimoji="0" lang="en-GB" sz="2400" b="0" i="0" u="none" strike="noStrike" kern="1200" cap="none" spc="0" normalizeH="0" baseline="0" noProof="0" dirty="0">
@@ -14852,7 +14852,7 @@
                               <a:ea typeface="+mn-ea"/>
                               <a:cs typeface="+mn-cs"/>
                             </a:rPr>
-                            <a:t>0.6 × 100</a:t>
+                            <a:t>0,6 × 100</a:t>
                           </a:r>
                         </a:p>
                       </a:txBody>
@@ -15142,7 +15142,7 @@
                               <a:ea typeface="+mn-ea"/>
                               <a:cs typeface="+mn-cs"/>
                             </a:rPr>
-                            <a:t>80,000 ÷ </a:t>
+                            <a:t>80 000 ÷ </a:t>
                           </a:r>
                           <a:r>
                             <a:rPr kumimoji="0" lang="en-GB" sz="2400" b="0" i="0" u="none" strike="noStrike" kern="1200" cap="none" spc="0" normalizeH="0" baseline="0" noProof="0" dirty="0">
@@ -15242,7 +15242,7 @@
                               <a:ea typeface="+mn-ea"/>
                               <a:cs typeface="+mn-cs"/>
                             </a:rPr>
-                            <a:t>0.000505 × 100</a:t>
+                            <a:t>0,000505 × 100</a:t>
                           </a:r>
                         </a:p>
                       </a:txBody>
@@ -15805,7 +15805,7 @@
                               <a:ea typeface="+mn-ea"/>
                               <a:cs typeface="+mn-cs"/>
                             </a:rPr>
-                            <a:t>5.050 × 1000</a:t>
+                            <a:t>5,050 × 1000</a:t>
                           </a:r>
                         </a:p>
                       </a:txBody>
@@ -15978,7 +15978,7 @@
                               <a:ea typeface="+mn-ea"/>
                               <a:cs typeface="+mn-cs"/>
                             </a:rPr>
-                            <a:t>0.8 × 1000</a:t>
+                            <a:t>0,8 × 1000</a:t>
                           </a:r>
                         </a:p>
                       </a:txBody>
@@ -16061,7 +16061,7 @@
                               <a:ea typeface="+mn-ea"/>
                               <a:cs typeface="+mn-cs"/>
                             </a:rPr>
-                            <a:t>5005 ÷ 10,000</a:t>
+                            <a:t>5005 ÷ 10 000</a:t>
                           </a:r>
                         </a:p>
                       </a:txBody>
@@ -16234,7 +16234,7 @@
                               <a:ea typeface="+mn-ea"/>
                               <a:cs typeface="+mn-cs"/>
                             </a:rPr>
-                            <a:t>0.5 ÷ </a:t>
+                            <a:t>0,5 ÷ </a:t>
                           </a:r>
                           <a:r>
                             <a:rPr kumimoji="0" lang="en-GB" sz="2400" b="0" i="0" u="none" strike="noStrike" kern="1200" cap="none" spc="0" normalizeH="0" baseline="0" noProof="0" dirty="0">
@@ -16655,7 +16655,7 @@
                               <a:ea typeface="+mn-ea"/>
                               <a:cs typeface="+mn-cs"/>
                             </a:rPr>
-                            <a:t>5.05 ÷ 1000 × 10</a:t>
+                            <a:t>5,05 ÷ 1000 × 10</a:t>
                           </a:r>
                         </a:p>
                       </a:txBody>
@@ -16745,7 +16745,7 @@
                               <a:ea typeface="+mn-ea"/>
                               <a:cs typeface="+mn-cs"/>
                             </a:rPr>
-                            <a:t>7,000 ÷ </a:t>
+                            <a:t>7 000 ÷ </a:t>
                           </a:r>
                           <a:r>
                             <a:rPr kumimoji="0" lang="en-GB" sz="2400" b="0" i="0" u="none" strike="noStrike" kern="1200" cap="none" spc="0" normalizeH="0" baseline="0" noProof="0" dirty="0">
@@ -16845,7 +16845,7 @@
                               <a:ea typeface="+mn-ea"/>
                               <a:cs typeface="+mn-cs"/>
                             </a:rPr>
-                            <a:t>500,000 ÷ </a:t>
+                            <a:t>500 000 ÷ </a:t>
                           </a:r>
                           <a:r>
                             <a:rPr kumimoji="0" lang="en-GB" sz="2400" b="0" i="0" u="none" strike="noStrike" kern="1200" cap="none" spc="0" normalizeH="0" baseline="0" noProof="0" dirty="0">
@@ -16945,7 +16945,7 @@
                               <a:ea typeface="+mn-ea"/>
                               <a:cs typeface="+mn-cs"/>
                             </a:rPr>
-                            <a:t>0.000055 × 10,000</a:t>
+                            <a:t>0,000055 × 10 000</a:t>
                           </a:r>
                         </a:p>
                       </a:txBody>

--- a/media/resources/files/ButunSandardyJanaOnduktardyKoboytuuBoluu-10-100-1000-TARSOYUNU.pptx
+++ b/media/resources/files/ButunSandardyJanaOnduktardyKoboytuuBoluu-10-100-1000-TARSOYUNU.pptx
@@ -8421,7 +8421,7 @@
           <a:p>
             <a:r>
               <a:rPr lang="en-GB" sz="4800" dirty="0"/>
-              <a:t>50500</a:t>
+              <a:t>50 500</a:t>
             </a:r>
             <a:endParaRPr lang="en-GB" sz="3600" dirty="0"/>
           </a:p>
@@ -8457,7 +8457,7 @@
           <a:p>
             <a:r>
               <a:rPr lang="en-GB" sz="3600" dirty="0"/>
-              <a:t>50500</a:t>
+              <a:t>50 500</a:t>
             </a:r>
             <a:endParaRPr lang="en-GB" sz="2400" dirty="0"/>
           </a:p>
@@ -8961,7 +8961,7 @@
           <a:p>
             <a:r>
               <a:rPr lang="en-GB" sz="3600" dirty="0"/>
-              <a:t>5,005</a:t>
+              <a:t>5 005</a:t>
             </a:r>
             <a:endParaRPr lang="en-GB" sz="2400" dirty="0"/>
           </a:p>
@@ -9069,7 +9069,7 @@
           <a:p>
             <a:r>
               <a:rPr lang="en-GB" sz="4800" dirty="0"/>
-              <a:t>5,005</a:t>
+              <a:t>5 005</a:t>
             </a:r>
             <a:endParaRPr lang="en-GB" sz="3600" dirty="0"/>
           </a:p>
@@ -11347,7 +11347,7 @@
                               <a:ea typeface="+mn-ea"/>
                               <a:cs typeface="+mn-cs"/>
                             </a:rPr>
-                            <a:t>0,000505 × 100</a:t>
+                            <a:t>0,000 505 × 100</a:t>
                           </a:r>
                         </a:p>
                       </a:txBody>
@@ -11910,7 +11910,7 @@
                               <a:ea typeface="+mn-ea"/>
                               <a:cs typeface="+mn-cs"/>
                             </a:rPr>
-                            <a:t>5,050 × 1000</a:t>
+                            <a:t>5 050 × 1000</a:t>
                           </a:r>
                         </a:p>
                       </a:txBody>
@@ -13050,7 +13050,7 @@
                               <a:ea typeface="+mn-ea"/>
                               <a:cs typeface="+mn-cs"/>
                             </a:rPr>
-                            <a:t>0,000055 × 10 000</a:t>
+                            <a:t>0,000 055 × 10 000</a:t>
                           </a:r>
                         </a:p>
                       </a:txBody>
@@ -15242,7 +15242,7 @@
                               <a:ea typeface="+mn-ea"/>
                               <a:cs typeface="+mn-cs"/>
                             </a:rPr>
-                            <a:t>0,000505 × 100</a:t>
+                            <a:t>0,000 505 × 100</a:t>
                           </a:r>
                         </a:p>
                       </a:txBody>
@@ -15805,7 +15805,7 @@
                               <a:ea typeface="+mn-ea"/>
                               <a:cs typeface="+mn-cs"/>
                             </a:rPr>
-                            <a:t>5,050 × 1000</a:t>
+                            <a:t>5 050 × 1000</a:t>
                           </a:r>
                         </a:p>
                       </a:txBody>
@@ -16945,7 +16945,7 @@
                               <a:ea typeface="+mn-ea"/>
                               <a:cs typeface="+mn-cs"/>
                             </a:rPr>
-                            <a:t>0,000055 × 10 000</a:t>
+                            <a:t>0,000 055 × 10 000</a:t>
                           </a:r>
                         </a:p>
                       </a:txBody>
